--- a/docs/entreprise/deck/Quantinvo-dossier-DSI.pptx
+++ b/docs/entreprise/deck/Quantinvo-dossier-DSI.pptx
@@ -5783,7 +5783,7 @@
                 <a:ea typeface="Arial" pitchFamily="34" charset="-122"/>
                 <a:cs typeface="Arial" pitchFamily="34" charset="-120"/>
               </a:rPr>
-              <a:t>App Store, Google Play</a:t>
+              <a:t>App Store</a:t>
             </a:r>
             <a:endParaRPr lang="en-US" sz="1150" dirty="0"/>
           </a:p>
@@ -5825,7 +5825,7 @@
                 <a:ea typeface="Arial" pitchFamily="34" charset="-122"/>
                 <a:cs typeface="Arial" pitchFamily="34" charset="-120"/>
               </a:rPr>
-              <a:t>Publication en cours</a:t>
+              <a:t>Publiée</a:t>
             </a:r>
             <a:endParaRPr lang="en-US" sz="1150" dirty="0"/>
           </a:p>
@@ -5862,7 +5862,114 @@
         </p:nvSpPr>
         <p:spPr>
           <a:xfrm>
-            <a:off x="5394960" y="3328416"/>
+            <a:off x="5394960" y="3063240"/>
+            <a:ext cx="2331720" cy="292608"/>
+          </a:xfrm>
+          <a:prstGeom prst="rect">
+            <a:avLst/>
+          </a:prstGeom>
+          <a:noFill/>
+          <a:ln/>
+        </p:spPr>
+        <p:txBody>
+          <a:bodyPr wrap="square" lIns="0" tIns="0" rIns="0" bIns="0" rtlCol="0" anchor="t"/>
+          <a:lstStyle/>
+          <a:p>
+            <a:pPr indent="0" marL="0">
+              <a:lnSpc>
+                <a:spcPct val="112000"/>
+              </a:lnSpc>
+              <a:buNone/>
+            </a:pPr>
+            <a:r>
+              <a:rPr lang="en-US" sz="1150" b="1" dirty="0">
+                <a:solidFill>
+                  <a:srgbClr val="14181A"/>
+                </a:solidFill>
+                <a:latin typeface="Arial" pitchFamily="34" charset="0"/>
+                <a:ea typeface="Arial" pitchFamily="34" charset="-122"/>
+                <a:cs typeface="Arial" pitchFamily="34" charset="-120"/>
+              </a:rPr>
+              <a:t>Google Play</a:t>
+            </a:r>
+            <a:endParaRPr lang="en-US" sz="1150" dirty="0"/>
+          </a:p>
+        </p:txBody>
+      </p:sp>
+      <p:sp>
+        <p:nvSpPr>
+          <p:cNvPr id="21" name="Text 18"/>
+          <p:cNvSpPr/>
+          <p:nvPr/>
+        </p:nvSpPr>
+        <p:spPr>
+          <a:xfrm>
+            <a:off x="7863840" y="3063240"/>
+            <a:ext cx="3456432" cy="292608"/>
+          </a:xfrm>
+          <a:prstGeom prst="rect">
+            <a:avLst/>
+          </a:prstGeom>
+          <a:noFill/>
+          <a:ln/>
+        </p:spPr>
+        <p:txBody>
+          <a:bodyPr wrap="square" lIns="0" tIns="0" rIns="0" bIns="0" rtlCol="0" anchor="t"/>
+          <a:lstStyle/>
+          <a:p>
+            <a:pPr indent="0" marL="0">
+              <a:lnSpc>
+                <a:spcPct val="112000"/>
+              </a:lnSpc>
+              <a:buNone/>
+            </a:pPr>
+            <a:r>
+              <a:rPr lang="en-US" sz="1150" dirty="0">
+                <a:solidFill>
+                  <a:srgbClr val="3A423F"/>
+                </a:solidFill>
+                <a:latin typeface="Arial" pitchFamily="34" charset="0"/>
+                <a:ea typeface="Arial" pitchFamily="34" charset="-122"/>
+                <a:cs typeface="Arial" pitchFamily="34" charset="-120"/>
+              </a:rPr>
+              <a:t>Publication en cours</a:t>
+            </a:r>
+            <a:endParaRPr lang="en-US" sz="1150" dirty="0"/>
+          </a:p>
+        </p:txBody>
+      </p:sp>
+      <p:sp>
+        <p:nvSpPr>
+          <p:cNvPr id="22" name="Shape 19"/>
+          <p:cNvSpPr/>
+          <p:nvPr/>
+        </p:nvSpPr>
+        <p:spPr>
+          <a:xfrm>
+            <a:off x="5394960" y="3383280"/>
+            <a:ext cx="6062472" cy="0"/>
+          </a:xfrm>
+          <a:prstGeom prst="line">
+            <a:avLst/>
+          </a:prstGeom>
+          <a:noFill/>
+          <a:ln w="9525">
+            <a:solidFill>
+              <a:srgbClr val="E2E5E1"/>
+            </a:solidFill>
+            <a:prstDash val="solid"/>
+          </a:ln>
+        </p:spPr>
+      </p:sp>
+      <p:sp>
+        <p:nvSpPr>
+          <p:cNvPr id="23" name="Text 20"/>
+          <p:cNvSpPr/>
+          <p:nvPr/>
+        </p:nvSpPr>
+        <p:spPr>
+          <a:xfrm>
+            <a:off x="5394960" y="3749040"/>
             <a:ext cx="6062472" cy="2926080"/>
           </a:xfrm>
           <a:prstGeom prst="rect">
@@ -6050,7 +6157,7 @@
       </p:sp>
       <p:sp>
         <p:nvSpPr>
-          <p:cNvPr id="21" name="Text 18"/>
+          <p:cNvPr id="24" name="Text 21"/>
           <p:cNvSpPr/>
           <p:nvPr/>
         </p:nvSpPr>
@@ -6089,7 +6196,7 @@
       </p:sp>
       <p:sp>
         <p:nvSpPr>
-          <p:cNvPr id="22" name="Text 19"/>
+          <p:cNvPr id="25" name="Text 22"/>
           <p:cNvSpPr/>
           <p:nvPr/>
         </p:nvSpPr>
